--- a/presentations/b13-governance/B13_Governance_Narrated.pptx
+++ b/presentations/b13-governance/B13_Governance_Narrated.pptx
@@ -187,7 +187,7 @@
     </p:spTree>
     <p:extLst>
       <p:ext uri="{BB962C8B-B14F-4D97-AF65-F5344CB8AC3E}">
-        <p14:creationId xmlns:p14="http://schemas.microsoft.com/office/powerpoint/2010/main" val="3344778945"/>
+        <p14:creationId xmlns:p14="http://schemas.microsoft.com/office/powerpoint/2010/main" val="2921810415"/>
       </p:ext>
     </p:extLst>
   </p:cSld>
@@ -2527,7 +2527,7 @@
             <a:hlinkClick r:id="" action="ppaction://media"/>
             <a:extLst>
               <a:ext uri="{FF2B5EF4-FFF2-40B4-BE49-F238E27FC236}">
-                <a16:creationId xmlns:a16="http://schemas.microsoft.com/office/drawing/2014/main" id="{99C5DF7B-A702-511C-26F9-475599290254}"/>
+                <a16:creationId xmlns:a16="http://schemas.microsoft.com/office/drawing/2014/main" id="{D044E82E-323D-947D-BE8C-3670D21042B7}"/>
               </a:ext>
             </a:extLst>
           </p:cNvPr>
@@ -2543,7 +2543,7 @@
                     <p:ext uri="{3AFAAA56-56D3-431D-BCD4-E75A35582382}">
                       <p173:tracksInfo xmlns:p173="http://schemas.microsoft.com/office/powerpoint/2017/3/main" displayLoc="slide">
                         <p173:trackLst>
-                          <p173:track id="{0EA8AF97-54D6-4B3B-B8EA-12F8CA447B3F}" label="English (captions)" lang="en-US" r:embed="rId6"/>
+                          <p173:track id="{7DD2DA4F-8366-4F16-96D9-0CF8C14835D7}" label="English (captions)" lang="en-US" r:embed="rId6"/>
                         </p173:trackLst>
                       </p173:tracksInfo>
                     </p:ext>
@@ -2561,7 +2561,7 @@
         </p:blipFill>
         <p:spPr>
           <a:xfrm>
-            <a:off x="127000" y="6350000"/>
+            <a:off x="12446000" y="127000"/>
             <a:ext cx="304800" cy="304800"/>
           </a:xfrm>
           <a:prstGeom prst="rect">
@@ -3949,7 +3949,7 @@
             <a:hlinkClick r:id="" action="ppaction://media"/>
             <a:extLst>
               <a:ext uri="{FF2B5EF4-FFF2-40B4-BE49-F238E27FC236}">
-                <a16:creationId xmlns:a16="http://schemas.microsoft.com/office/drawing/2014/main" id="{58368DA9-546E-3D18-C553-0E185D213E20}"/>
+                <a16:creationId xmlns:a16="http://schemas.microsoft.com/office/drawing/2014/main" id="{BF11DFA6-83BD-F374-09C4-CAAE7E0C9EAA}"/>
               </a:ext>
             </a:extLst>
           </p:cNvPr>
@@ -3965,7 +3965,7 @@
                     <p:ext uri="{3AFAAA56-56D3-431D-BCD4-E75A35582382}">
                       <p173:tracksInfo xmlns:p173="http://schemas.microsoft.com/office/powerpoint/2017/3/main" displayLoc="slide">
                         <p173:trackLst>
-                          <p173:track id="{61EA9AA1-74FB-43BE-948A-43F747CE9BCF}" label="English (captions)" lang="en-US" r:embed="rId9"/>
+                          <p173:track id="{84C5067D-8531-4266-8D2E-02BC56DDA653}" label="English (captions)" lang="en-US" r:embed="rId9"/>
                         </p173:trackLst>
                       </p173:tracksInfo>
                     </p:ext>
@@ -3983,7 +3983,7 @@
         </p:blipFill>
         <p:spPr>
           <a:xfrm>
-            <a:off x="127000" y="6350000"/>
+            <a:off x="12446000" y="127000"/>
             <a:ext cx="304800" cy="304800"/>
           </a:xfrm>
           <a:prstGeom prst="rect">
@@ -6157,7 +6157,7 @@
             <a:hlinkClick r:id="" action="ppaction://media"/>
             <a:extLst>
               <a:ext uri="{FF2B5EF4-FFF2-40B4-BE49-F238E27FC236}">
-                <a16:creationId xmlns:a16="http://schemas.microsoft.com/office/drawing/2014/main" id="{2CCF83D3-B8CE-4178-F9C2-C6DB9F9EA174}"/>
+                <a16:creationId xmlns:a16="http://schemas.microsoft.com/office/drawing/2014/main" id="{DF551225-9CF1-AD79-8C72-C770145DB1D6}"/>
               </a:ext>
             </a:extLst>
           </p:cNvPr>
@@ -6173,7 +6173,7 @@
                     <p:ext uri="{3AFAAA56-56D3-431D-BCD4-E75A35582382}">
                       <p173:tracksInfo xmlns:p173="http://schemas.microsoft.com/office/powerpoint/2017/3/main" displayLoc="slide">
                         <p173:trackLst>
-                          <p173:track id="{792B96B6-C6D8-4733-BCB0-2F4DA1B42208}" label="English (captions)" lang="en-US" r:embed="rId8"/>
+                          <p173:track id="{1786F3C8-E6DE-4341-BD18-8EA6BC8BB61A}" label="English (captions)" lang="en-US" r:embed="rId8"/>
                         </p173:trackLst>
                       </p173:tracksInfo>
                     </p:ext>
@@ -6191,7 +6191,7 @@
         </p:blipFill>
         <p:spPr>
           <a:xfrm>
-            <a:off x="127000" y="6350000"/>
+            <a:off x="12446000" y="127000"/>
             <a:ext cx="304800" cy="304800"/>
           </a:xfrm>
           <a:prstGeom prst="rect">
@@ -7771,7 +7771,7 @@
             <a:hlinkClick r:id="" action="ppaction://media"/>
             <a:extLst>
               <a:ext uri="{FF2B5EF4-FFF2-40B4-BE49-F238E27FC236}">
-                <a16:creationId xmlns:a16="http://schemas.microsoft.com/office/drawing/2014/main" id="{8155B25D-1199-13EE-1354-C6929FA7178B}"/>
+                <a16:creationId xmlns:a16="http://schemas.microsoft.com/office/drawing/2014/main" id="{9D830F87-939A-C784-2B19-B568DECEE961}"/>
               </a:ext>
             </a:extLst>
           </p:cNvPr>
@@ -7787,7 +7787,7 @@
                     <p:ext uri="{3AFAAA56-56D3-431D-BCD4-E75A35582382}">
                       <p173:tracksInfo xmlns:p173="http://schemas.microsoft.com/office/powerpoint/2017/3/main" displayLoc="slide">
                         <p173:trackLst>
-                          <p173:track id="{A680092F-38C9-4C23-AC20-B84618BBD1A4}" label="English (captions)" lang="en-US" r:embed="rId8"/>
+                          <p173:track id="{F2D2BC28-8D34-481A-BFAC-72C449C4EDD7}" label="English (captions)" lang="en-US" r:embed="rId8"/>
                         </p173:trackLst>
                       </p173:tracksInfo>
                     </p:ext>
@@ -7805,7 +7805,7 @@
         </p:blipFill>
         <p:spPr>
           <a:xfrm>
-            <a:off x="127000" y="6350000"/>
+            <a:off x="12446000" y="127000"/>
             <a:ext cx="304800" cy="304800"/>
           </a:xfrm>
           <a:prstGeom prst="rect">
@@ -9154,7 +9154,7 @@
             <a:hlinkClick r:id="" action="ppaction://media"/>
             <a:extLst>
               <a:ext uri="{FF2B5EF4-FFF2-40B4-BE49-F238E27FC236}">
-                <a16:creationId xmlns:a16="http://schemas.microsoft.com/office/drawing/2014/main" id="{852729DE-FD02-4260-9BC5-166DA6E76A53}"/>
+                <a16:creationId xmlns:a16="http://schemas.microsoft.com/office/drawing/2014/main" id="{CF32D39D-0930-F096-1F7E-DE2B01F3248F}"/>
               </a:ext>
             </a:extLst>
           </p:cNvPr>
@@ -9170,7 +9170,7 @@
                     <p:ext uri="{3AFAAA56-56D3-431D-BCD4-E75A35582382}">
                       <p173:tracksInfo xmlns:p173="http://schemas.microsoft.com/office/powerpoint/2017/3/main" displayLoc="slide">
                         <p173:trackLst>
-                          <p173:track id="{CB0D8A38-8BB6-4C50-8DD5-4F1843DDDBDA}" label="English (captions)" lang="en-US" r:embed="rId9"/>
+                          <p173:track id="{0DC5ABDA-62BD-4BE5-8FA6-B9517F1D0A08}" label="English (captions)" lang="en-US" r:embed="rId9"/>
                         </p173:trackLst>
                       </p173:tracksInfo>
                     </p:ext>
@@ -9188,7 +9188,7 @@
         </p:blipFill>
         <p:spPr>
           <a:xfrm>
-            <a:off x="127000" y="6350000"/>
+            <a:off x="12446000" y="127000"/>
             <a:ext cx="304800" cy="304800"/>
           </a:xfrm>
           <a:prstGeom prst="rect">
@@ -10257,7 +10257,7 @@
             <a:hlinkClick r:id="" action="ppaction://media"/>
             <a:extLst>
               <a:ext uri="{FF2B5EF4-FFF2-40B4-BE49-F238E27FC236}">
-                <a16:creationId xmlns:a16="http://schemas.microsoft.com/office/drawing/2014/main" id="{7ADACFE3-7437-CB4A-C3F1-1F8122B073CD}"/>
+                <a16:creationId xmlns:a16="http://schemas.microsoft.com/office/drawing/2014/main" id="{3CE0A661-0436-AB30-A858-78E349B86429}"/>
               </a:ext>
             </a:extLst>
           </p:cNvPr>
@@ -10273,7 +10273,7 @@
                     <p:ext uri="{3AFAAA56-56D3-431D-BCD4-E75A35582382}">
                       <p173:tracksInfo xmlns:p173="http://schemas.microsoft.com/office/powerpoint/2017/3/main" displayLoc="slide">
                         <p173:trackLst>
-                          <p173:track id="{FBB51843-4D07-488B-9097-D3BDD8DF1C9D}" label="English (captions)" lang="en-US" r:embed="rId11"/>
+                          <p173:track id="{222CC8AF-D4E9-4308-AF51-D8221C1525AE}" label="English (captions)" lang="en-US" r:embed="rId11"/>
                         </p173:trackLst>
                       </p173:tracksInfo>
                     </p:ext>
@@ -10291,7 +10291,7 @@
         </p:blipFill>
         <p:spPr>
           <a:xfrm>
-            <a:off x="127000" y="6350000"/>
+            <a:off x="12446000" y="127000"/>
             <a:ext cx="304800" cy="304800"/>
           </a:xfrm>
           <a:prstGeom prst="rect">
@@ -11364,7 +11364,7 @@
             <a:hlinkClick r:id="" action="ppaction://media"/>
             <a:extLst>
               <a:ext uri="{FF2B5EF4-FFF2-40B4-BE49-F238E27FC236}">
-                <a16:creationId xmlns:a16="http://schemas.microsoft.com/office/drawing/2014/main" id="{CAA03A6D-9EAF-2006-3626-B0A3E3DE741F}"/>
+                <a16:creationId xmlns:a16="http://schemas.microsoft.com/office/drawing/2014/main" id="{42E99A1D-60F8-F7B6-2FDE-061A51A836A1}"/>
               </a:ext>
             </a:extLst>
           </p:cNvPr>
@@ -11380,7 +11380,7 @@
                     <p:ext uri="{3AFAAA56-56D3-431D-BCD4-E75A35582382}">
                       <p173:tracksInfo xmlns:p173="http://schemas.microsoft.com/office/powerpoint/2017/3/main" displayLoc="slide">
                         <p173:trackLst>
-                          <p173:track id="{8831C203-96A8-42E2-843C-409E78861FEA}" label="English (captions)" lang="en-US" r:embed="rId8"/>
+                          <p173:track id="{46D6B8A1-CA30-45D7-B3A5-5DD050F94590}" label="English (captions)" lang="en-US" r:embed="rId8"/>
                         </p173:trackLst>
                       </p173:tracksInfo>
                     </p:ext>
@@ -11398,7 +11398,7 @@
         </p:blipFill>
         <p:spPr>
           <a:xfrm>
-            <a:off x="127000" y="6350000"/>
+            <a:off x="12446000" y="127000"/>
             <a:ext cx="304800" cy="304800"/>
           </a:xfrm>
           <a:prstGeom prst="rect">
@@ -12854,7 +12854,7 @@
             <a:hlinkClick r:id="" action="ppaction://media"/>
             <a:extLst>
               <a:ext uri="{FF2B5EF4-FFF2-40B4-BE49-F238E27FC236}">
-                <a16:creationId xmlns:a16="http://schemas.microsoft.com/office/drawing/2014/main" id="{BCBEAB66-D9FB-8C11-E2FF-5EEB1F5AFD09}"/>
+                <a16:creationId xmlns:a16="http://schemas.microsoft.com/office/drawing/2014/main" id="{CCC7F4FE-BB39-1DF7-81FE-31ED8F8641C5}"/>
               </a:ext>
             </a:extLst>
           </p:cNvPr>
@@ -12870,7 +12870,7 @@
                     <p:ext uri="{3AFAAA56-56D3-431D-BCD4-E75A35582382}">
                       <p173:tracksInfo xmlns:p173="http://schemas.microsoft.com/office/powerpoint/2017/3/main" displayLoc="slide">
                         <p173:trackLst>
-                          <p173:track id="{9DBAB105-BA5D-4B32-8365-62E66BBB23A8}" label="English (captions)" lang="en-US" r:embed="rId9"/>
+                          <p173:track id="{039DC050-C934-4C47-9AFC-CC0551C59E86}" label="English (captions)" lang="en-US" r:embed="rId9"/>
                         </p173:trackLst>
                       </p173:tracksInfo>
                     </p:ext>
@@ -12888,7 +12888,7 @@
         </p:blipFill>
         <p:spPr>
           <a:xfrm>
-            <a:off x="127000" y="6350000"/>
+            <a:off x="12446000" y="127000"/>
             <a:ext cx="304800" cy="304800"/>
           </a:xfrm>
           <a:prstGeom prst="rect">
@@ -14618,7 +14618,7 @@
             <a:hlinkClick r:id="" action="ppaction://media"/>
             <a:extLst>
               <a:ext uri="{FF2B5EF4-FFF2-40B4-BE49-F238E27FC236}">
-                <a16:creationId xmlns:a16="http://schemas.microsoft.com/office/drawing/2014/main" id="{FA8F342E-D9DE-536B-4293-7BECD0503571}"/>
+                <a16:creationId xmlns:a16="http://schemas.microsoft.com/office/drawing/2014/main" id="{F818C1EB-BB0D-CE58-7468-557E9711E9D2}"/>
               </a:ext>
             </a:extLst>
           </p:cNvPr>
@@ -14634,7 +14634,7 @@
                     <p:ext uri="{3AFAAA56-56D3-431D-BCD4-E75A35582382}">
                       <p173:tracksInfo xmlns:p173="http://schemas.microsoft.com/office/powerpoint/2017/3/main" displayLoc="slide">
                         <p173:trackLst>
-                          <p173:track id="{FE6050E6-A21A-40EB-9CF3-70D7F0925BBC}" label="English (captions)" lang="en-US" r:embed="rId8"/>
+                          <p173:track id="{9B7A65B8-790E-47E4-AAF3-F0404681122E}" label="English (captions)" lang="en-US" r:embed="rId8"/>
                         </p173:trackLst>
                       </p173:tracksInfo>
                     </p:ext>
@@ -14652,7 +14652,7 @@
         </p:blipFill>
         <p:spPr>
           <a:xfrm>
-            <a:off x="127000" y="6350000"/>
+            <a:off x="12446000" y="127000"/>
             <a:ext cx="304800" cy="304800"/>
           </a:xfrm>
           <a:prstGeom prst="rect">
@@ -16108,7 +16108,7 @@
             <a:hlinkClick r:id="" action="ppaction://media"/>
             <a:extLst>
               <a:ext uri="{FF2B5EF4-FFF2-40B4-BE49-F238E27FC236}">
-                <a16:creationId xmlns:a16="http://schemas.microsoft.com/office/drawing/2014/main" id="{1BF40668-BAC5-40EE-F432-CB5A650C21F0}"/>
+                <a16:creationId xmlns:a16="http://schemas.microsoft.com/office/drawing/2014/main" id="{CEFEE2DC-CCD1-6FC3-2CE7-E46D369FABC4}"/>
               </a:ext>
             </a:extLst>
           </p:cNvPr>
@@ -16124,7 +16124,7 @@
                     <p:ext uri="{3AFAAA56-56D3-431D-BCD4-E75A35582382}">
                       <p173:tracksInfo xmlns:p173="http://schemas.microsoft.com/office/powerpoint/2017/3/main" displayLoc="slide">
                         <p173:trackLst>
-                          <p173:track id="{FAB6E9E3-C971-4142-862A-DA601C872B95}" label="English (captions)" lang="en-US" r:embed="rId9"/>
+                          <p173:track id="{658BDE0E-4EF5-4386-A124-F973B3E1CD87}" label="English (captions)" lang="en-US" r:embed="rId9"/>
                         </p173:trackLst>
                       </p173:tracksInfo>
                     </p:ext>
@@ -16142,7 +16142,7 @@
         </p:blipFill>
         <p:spPr>
           <a:xfrm>
-            <a:off x="127000" y="6350000"/>
+            <a:off x="12446000" y="127000"/>
             <a:ext cx="304800" cy="304800"/>
           </a:xfrm>
           <a:prstGeom prst="rect">
@@ -17297,7 +17297,7 @@
             <a:hlinkClick r:id="" action="ppaction://media"/>
             <a:extLst>
               <a:ext uri="{FF2B5EF4-FFF2-40B4-BE49-F238E27FC236}">
-                <a16:creationId xmlns:a16="http://schemas.microsoft.com/office/drawing/2014/main" id="{6ED495D2-9EBB-49B9-BEE3-88C3725EEB23}"/>
+                <a16:creationId xmlns:a16="http://schemas.microsoft.com/office/drawing/2014/main" id="{2B7EC7BE-A4B3-1425-6397-D7C70905BA4A}"/>
               </a:ext>
             </a:extLst>
           </p:cNvPr>
@@ -17313,7 +17313,7 @@
                     <p:ext uri="{3AFAAA56-56D3-431D-BCD4-E75A35582382}">
                       <p173:tracksInfo xmlns:p173="http://schemas.microsoft.com/office/powerpoint/2017/3/main" displayLoc="slide">
                         <p173:trackLst>
-                          <p173:track id="{B1A0D860-7E02-49A5-80A6-37524EBDC0C6}" label="English (captions)" lang="en-US" r:embed="rId10"/>
+                          <p173:track id="{E2473114-47D2-4715-A7B7-C17BCDA805CE}" label="English (captions)" lang="en-US" r:embed="rId10"/>
                         </p173:trackLst>
                       </p173:tracksInfo>
                     </p:ext>
@@ -17331,7 +17331,7 @@
         </p:blipFill>
         <p:spPr>
           <a:xfrm>
-            <a:off x="127000" y="6350000"/>
+            <a:off x="12446000" y="127000"/>
             <a:ext cx="304800" cy="304800"/>
           </a:xfrm>
           <a:prstGeom prst="rect">
@@ -18918,7 +18918,7 @@
             <a:hlinkClick r:id="" action="ppaction://media"/>
             <a:extLst>
               <a:ext uri="{FF2B5EF4-FFF2-40B4-BE49-F238E27FC236}">
-                <a16:creationId xmlns:a16="http://schemas.microsoft.com/office/drawing/2014/main" id="{14CF45DE-8381-ED4B-7991-FDEEE439E53B}"/>
+                <a16:creationId xmlns:a16="http://schemas.microsoft.com/office/drawing/2014/main" id="{77830F13-B2AB-D41A-D170-0D291C8EF911}"/>
               </a:ext>
             </a:extLst>
           </p:cNvPr>
@@ -18934,7 +18934,7 @@
                     <p:ext uri="{3AFAAA56-56D3-431D-BCD4-E75A35582382}">
                       <p173:tracksInfo xmlns:p173="http://schemas.microsoft.com/office/powerpoint/2017/3/main" displayLoc="slide">
                         <p173:trackLst>
-                          <p173:track id="{E811B501-95FE-4ADF-BB8A-B019FB88E59B}" label="English (captions)" lang="en-US" r:embed="rId8"/>
+                          <p173:track id="{6206D27D-D71F-4738-A5EB-76DDFBD69B25}" label="English (captions)" lang="en-US" r:embed="rId8"/>
                         </p173:trackLst>
                       </p173:tracksInfo>
                     </p:ext>
@@ -18952,7 +18952,7 @@
         </p:blipFill>
         <p:spPr>
           <a:xfrm>
-            <a:off x="127000" y="6350000"/>
+            <a:off x="12446000" y="127000"/>
             <a:ext cx="304800" cy="304800"/>
           </a:xfrm>
           <a:prstGeom prst="rect">
@@ -20732,7 +20732,7 @@
             <a:hlinkClick r:id="" action="ppaction://media"/>
             <a:extLst>
               <a:ext uri="{FF2B5EF4-FFF2-40B4-BE49-F238E27FC236}">
-                <a16:creationId xmlns:a16="http://schemas.microsoft.com/office/drawing/2014/main" id="{B795DD6E-57E9-1357-BAC3-109BC74C73D4}"/>
+                <a16:creationId xmlns:a16="http://schemas.microsoft.com/office/drawing/2014/main" id="{2608AB9C-7DAD-E2BC-755A-38DA56391826}"/>
               </a:ext>
             </a:extLst>
           </p:cNvPr>
@@ -20748,7 +20748,7 @@
                     <p:ext uri="{3AFAAA56-56D3-431D-BCD4-E75A35582382}">
                       <p173:tracksInfo xmlns:p173="http://schemas.microsoft.com/office/powerpoint/2017/3/main" displayLoc="slide">
                         <p173:trackLst>
-                          <p173:track id="{70B5203B-2C1A-45F1-9757-27E8117607CB}" label="English (captions)" lang="en-US" r:embed="rId8"/>
+                          <p173:track id="{9782CF41-BC32-4D42-BEED-46A7EB570FAB}" label="English (captions)" lang="en-US" r:embed="rId8"/>
                         </p173:trackLst>
                       </p173:tracksInfo>
                     </p:ext>
@@ -20766,7 +20766,7 @@
         </p:blipFill>
         <p:spPr>
           <a:xfrm>
-            <a:off x="127000" y="6350000"/>
+            <a:off x="12446000" y="127000"/>
             <a:ext cx="304800" cy="304800"/>
           </a:xfrm>
           <a:prstGeom prst="rect">
@@ -21839,7 +21839,7 @@
             <a:hlinkClick r:id="" action="ppaction://media"/>
             <a:extLst>
               <a:ext uri="{FF2B5EF4-FFF2-40B4-BE49-F238E27FC236}">
-                <a16:creationId xmlns:a16="http://schemas.microsoft.com/office/drawing/2014/main" id="{ABE4C590-C410-E639-5BBA-E3255E7C0659}"/>
+                <a16:creationId xmlns:a16="http://schemas.microsoft.com/office/drawing/2014/main" id="{95803A08-FA0E-E911-24B7-F20AFD38C9A6}"/>
               </a:ext>
             </a:extLst>
           </p:cNvPr>
@@ -21855,7 +21855,7 @@
                     <p:ext uri="{3AFAAA56-56D3-431D-BCD4-E75A35582382}">
                       <p173:tracksInfo xmlns:p173="http://schemas.microsoft.com/office/powerpoint/2017/3/main" displayLoc="slide">
                         <p173:trackLst>
-                          <p173:track id="{2D1D4AB9-AB0B-41ED-9AC9-28C9ACA2FF89}" label="English (captions)" lang="en-US" r:embed="rId8"/>
+                          <p173:track id="{BF610D60-6197-4DE2-945B-42E1972EEF46}" label="English (captions)" lang="en-US" r:embed="rId8"/>
                         </p173:trackLst>
                       </p173:tracksInfo>
                     </p:ext>
@@ -21873,7 +21873,7 @@
         </p:blipFill>
         <p:spPr>
           <a:xfrm>
-            <a:off x="127000" y="6350000"/>
+            <a:off x="12446000" y="127000"/>
             <a:ext cx="304800" cy="304800"/>
           </a:xfrm>
           <a:prstGeom prst="rect">
